--- a/Video/Defensa-PechaKucha-MLP.pptx
+++ b/Video/Defensa-PechaKucha-MLP.pptx
@@ -315,7 +315,282 @@
           <a:lstStyle/>
           <a:p>
             <a:r>
-              <a:t>Buenas. Somos Gaitán, Debona, Agüero y Ocampo. Extendemos nuestro Trabajo Práctico de mantenimiento predictivo industrial: dado un conjunto de variables de operación de una máquina, queremos predecir si va a fallar. Hoy sumamos una red neuronal —un Perceptrón Multicapa— y la comparamos contra los modelos clásicos que ya entrenamos.</a:t>
+              <a:rPr dirty="0" err="1"/>
+              <a:t>Buenas</a:t>
+            </a:r>
+            <a:r>
+              <a:rPr dirty="0"/>
+              <a:t>. Somos </a:t>
+            </a:r>
+            <a:r>
+              <a:rPr lang="es-ES" dirty="0"/>
+              <a:t>Gonzalo </a:t>
+            </a:r>
+            <a:r>
+              <a:rPr dirty="0"/>
+              <a:t>Gaitán, </a:t>
+            </a:r>
+            <a:r>
+              <a:rPr lang="es-ES" dirty="0"/>
+              <a:t>Marcos </a:t>
+            </a:r>
+            <a:r>
+              <a:rPr dirty="0"/>
+              <a:t>Debona,</a:t>
+            </a:r>
+            <a:r>
+              <a:rPr lang="es-ES" dirty="0"/>
+              <a:t> Gonzalo</a:t>
+            </a:r>
+            <a:r>
+              <a:rPr dirty="0"/>
+              <a:t> Agüero y </a:t>
+            </a:r>
+            <a:r>
+              <a:rPr lang="es-ES" dirty="0"/>
+              <a:t>Franco </a:t>
+            </a:r>
+            <a:r>
+              <a:rPr dirty="0"/>
+              <a:t>Ocampo. </a:t>
+            </a:r>
+            <a:endParaRPr lang="es-ES" dirty="0"/>
+          </a:p>
+          <a:p>
+            <a:r>
+              <a:rPr lang="es-ES" dirty="0"/>
+              <a:t>En este caso, e</a:t>
+            </a:r>
+            <a:r>
+              <a:rPr dirty="0" err="1"/>
+              <a:t>xtendemos</a:t>
+            </a:r>
+            <a:r>
+              <a:rPr dirty="0"/>
+              <a:t> </a:t>
+            </a:r>
+            <a:r>
+              <a:rPr dirty="0" err="1"/>
+              <a:t>nuestro</a:t>
+            </a:r>
+            <a:r>
+              <a:rPr dirty="0"/>
+              <a:t> </a:t>
+            </a:r>
+            <a:r>
+              <a:rPr dirty="0" err="1"/>
+              <a:t>Trabajo</a:t>
+            </a:r>
+            <a:r>
+              <a:rPr dirty="0"/>
+              <a:t> </a:t>
+            </a:r>
+            <a:r>
+              <a:rPr dirty="0" err="1"/>
+              <a:t>Práctico</a:t>
+            </a:r>
+            <a:r>
+              <a:rPr dirty="0"/>
+              <a:t> </a:t>
+            </a:r>
+            <a:r>
+              <a:rPr lang="es-ES" dirty="0"/>
+              <a:t>número 1 de Ciencia de Datos. Trata sobre el </a:t>
+            </a:r>
+            <a:r>
+              <a:rPr dirty="0" err="1"/>
+              <a:t>mantenimiento</a:t>
+            </a:r>
+            <a:r>
+              <a:rPr dirty="0"/>
+              <a:t> </a:t>
+            </a:r>
+            <a:r>
+              <a:rPr dirty="0" err="1"/>
+              <a:t>predictivo</a:t>
+            </a:r>
+            <a:r>
+              <a:rPr dirty="0"/>
+              <a:t> industrial</a:t>
+            </a:r>
+            <a:r>
+              <a:rPr lang="es-ES" dirty="0"/>
+              <a:t> donde</a:t>
+            </a:r>
+            <a:r>
+              <a:rPr dirty="0"/>
+              <a:t> dado un conjunto de variables de </a:t>
+            </a:r>
+            <a:r>
+              <a:rPr dirty="0" err="1"/>
+              <a:t>operación</a:t>
+            </a:r>
+            <a:r>
+              <a:rPr dirty="0"/>
+              <a:t> de </a:t>
+            </a:r>
+            <a:r>
+              <a:rPr dirty="0" err="1"/>
+              <a:t>una</a:t>
+            </a:r>
+            <a:r>
+              <a:rPr dirty="0"/>
+              <a:t> </a:t>
+            </a:r>
+            <a:r>
+              <a:rPr dirty="0" err="1"/>
+              <a:t>máquina</a:t>
+            </a:r>
+            <a:r>
+              <a:rPr dirty="0"/>
+              <a:t>, </a:t>
+            </a:r>
+            <a:r>
+              <a:rPr dirty="0" err="1"/>
+              <a:t>queremos</a:t>
+            </a:r>
+            <a:r>
+              <a:rPr dirty="0"/>
+              <a:t> </a:t>
+            </a:r>
+            <a:r>
+              <a:rPr dirty="0" err="1"/>
+              <a:t>predecir</a:t>
+            </a:r>
+            <a:r>
+              <a:rPr dirty="0"/>
+              <a:t> </a:t>
+            </a:r>
+            <a:r>
+              <a:rPr dirty="0" err="1"/>
+              <a:t>si</a:t>
+            </a:r>
+            <a:r>
+              <a:rPr dirty="0"/>
+              <a:t> </a:t>
+            </a:r>
+            <a:r>
+              <a:rPr lang="es-ES" dirty="0"/>
+              <a:t>ésta </a:t>
+            </a:r>
+            <a:r>
+              <a:rPr dirty="0" err="1"/>
+              <a:t>va</a:t>
+            </a:r>
+            <a:r>
+              <a:rPr dirty="0"/>
+              <a:t> a </a:t>
+            </a:r>
+            <a:r>
+              <a:rPr dirty="0" err="1"/>
+              <a:t>fallar</a:t>
+            </a:r>
+            <a:r>
+              <a:rPr dirty="0"/>
+              <a:t>. </a:t>
+            </a:r>
+            <a:endParaRPr lang="es-ES" dirty="0"/>
+          </a:p>
+          <a:p>
+            <a:r>
+              <a:rPr dirty="0"/>
+              <a:t>Hoy </a:t>
+            </a:r>
+            <a:r>
+              <a:rPr dirty="0" err="1"/>
+              <a:t>sumamos</a:t>
+            </a:r>
+            <a:r>
+              <a:rPr dirty="0"/>
+              <a:t> </a:t>
+            </a:r>
+            <a:r>
+              <a:rPr dirty="0" err="1"/>
+              <a:t>una</a:t>
+            </a:r>
+            <a:r>
+              <a:rPr dirty="0"/>
+              <a:t> red neuronal</a:t>
+            </a:r>
+            <a:r>
+              <a:rPr lang="es-ES" dirty="0"/>
+              <a:t>, específicamente, </a:t>
+            </a:r>
+            <a:r>
+              <a:rPr dirty="0"/>
+              <a:t>un </a:t>
+            </a:r>
+            <a:r>
+              <a:rPr dirty="0" err="1"/>
+              <a:t>Perceptrón</a:t>
+            </a:r>
+            <a:r>
+              <a:rPr dirty="0"/>
+              <a:t> </a:t>
+            </a:r>
+            <a:r>
+              <a:rPr dirty="0" err="1"/>
+              <a:t>Multicapa</a:t>
+            </a:r>
+            <a:r>
+              <a:rPr dirty="0"/>
+              <a:t> y la </a:t>
+            </a:r>
+            <a:r>
+              <a:rPr dirty="0" err="1"/>
+              <a:t>comparamos</a:t>
+            </a:r>
+            <a:r>
+              <a:rPr dirty="0"/>
+              <a:t> contra </a:t>
+            </a:r>
+            <a:r>
+              <a:rPr dirty="0" err="1"/>
+              <a:t>los</a:t>
+            </a:r>
+            <a:r>
+              <a:rPr dirty="0"/>
+              <a:t> </a:t>
+            </a:r>
+            <a:r>
+              <a:rPr dirty="0" err="1"/>
+              <a:t>modelos</a:t>
+            </a:r>
+            <a:r>
+              <a:rPr dirty="0"/>
+              <a:t> </a:t>
+            </a:r>
+            <a:r>
+              <a:rPr dirty="0" err="1"/>
+              <a:t>clásicos</a:t>
+            </a:r>
+            <a:r>
+              <a:rPr dirty="0"/>
+              <a:t> </a:t>
+            </a:r>
+            <a:r>
+              <a:rPr dirty="0" err="1"/>
+              <a:t>que</a:t>
+            </a:r>
+            <a:r>
+              <a:rPr dirty="0"/>
+              <a:t> </a:t>
+            </a:r>
+            <a:r>
+              <a:rPr dirty="0" err="1"/>
+              <a:t>ya</a:t>
+            </a:r>
+            <a:r>
+              <a:rPr dirty="0"/>
+              <a:t> </a:t>
+            </a:r>
+            <a:r>
+              <a:rPr dirty="0" err="1"/>
+              <a:t>entrenamos</a:t>
+            </a:r>
+            <a:r>
+              <a:rPr dirty="0"/>
+              <a:t>.</a:t>
             </a:r>
           </a:p>
         </p:txBody>
@@ -665,7 +940,184 @@
           <a:lstStyle/>
           <a:p>
             <a:r>
-              <a:t>El MLP rinde muy bien: 96% de accuracy, F1 de 0.96 y un AUC de 0.991. Ajustamos el umbral de decisión a 0.3 en lugar de 0.5, priorizando el recall: alcanzamos 98% de fallas detectadas. En mantenimiento, dejar pasar una falla real es mucho más caro que una falsa alarma.</a:t>
+              <a:rPr dirty="0"/>
+              <a:t>El MLP </a:t>
+            </a:r>
+            <a:r>
+              <a:rPr dirty="0" err="1"/>
+              <a:t>rinde</a:t>
+            </a:r>
+            <a:r>
+              <a:rPr dirty="0"/>
+              <a:t> </a:t>
+            </a:r>
+            <a:r>
+              <a:rPr dirty="0" err="1"/>
+              <a:t>muy</a:t>
+            </a:r>
+            <a:r>
+              <a:rPr dirty="0"/>
+              <a:t> bien: 96% de accuracy, F1 de 0.96 y un AUC de 0.991. </a:t>
+            </a:r>
+            <a:r>
+              <a:rPr dirty="0" err="1"/>
+              <a:t>Ajustamos</a:t>
+            </a:r>
+            <a:r>
+              <a:rPr dirty="0"/>
+              <a:t> </a:t>
+            </a:r>
+            <a:r>
+              <a:rPr dirty="0" err="1"/>
+              <a:t>el</a:t>
+            </a:r>
+            <a:r>
+              <a:rPr dirty="0"/>
+              <a:t> umbral de </a:t>
+            </a:r>
+            <a:r>
+              <a:rPr dirty="0" err="1"/>
+              <a:t>decisión</a:t>
+            </a:r>
+            <a:r>
+              <a:rPr dirty="0"/>
+              <a:t> a 0.3 </a:t>
+            </a:r>
+            <a:r>
+              <a:rPr dirty="0" err="1"/>
+              <a:t>en</a:t>
+            </a:r>
+            <a:r>
+              <a:rPr dirty="0"/>
+              <a:t> </a:t>
+            </a:r>
+            <a:r>
+              <a:rPr dirty="0" err="1"/>
+              <a:t>lugar</a:t>
+            </a:r>
+            <a:r>
+              <a:rPr dirty="0"/>
+              <a:t> de 0.5, </a:t>
+            </a:r>
+            <a:r>
+              <a:rPr dirty="0" err="1"/>
+              <a:t>priorizando</a:t>
+            </a:r>
+            <a:r>
+              <a:rPr dirty="0"/>
+              <a:t> </a:t>
+            </a:r>
+            <a:r>
+              <a:rPr dirty="0" err="1"/>
+              <a:t>el</a:t>
+            </a:r>
+            <a:r>
+              <a:rPr dirty="0"/>
+              <a:t> recall: </a:t>
+            </a:r>
+            <a:r>
+              <a:rPr dirty="0" err="1"/>
+              <a:t>alcanzamos</a:t>
+            </a:r>
+            <a:r>
+              <a:rPr dirty="0"/>
+              <a:t> 98% de </a:t>
+            </a:r>
+            <a:r>
+              <a:rPr dirty="0" err="1"/>
+              <a:t>fallas</a:t>
+            </a:r>
+            <a:r>
+              <a:rPr dirty="0"/>
+              <a:t> </a:t>
+            </a:r>
+            <a:r>
+              <a:rPr dirty="0" err="1"/>
+              <a:t>detectadas</a:t>
+            </a:r>
+            <a:r>
+              <a:rPr dirty="0"/>
+              <a:t>. En </a:t>
+            </a:r>
+            <a:r>
+              <a:rPr dirty="0" err="1"/>
+              <a:t>mantenimiento</a:t>
+            </a:r>
+            <a:r>
+              <a:rPr dirty="0"/>
+              <a:t>, </a:t>
+            </a:r>
+            <a:r>
+              <a:rPr dirty="0" err="1"/>
+              <a:t>dejar</a:t>
+            </a:r>
+            <a:r>
+              <a:rPr dirty="0"/>
+              <a:t> pasar </a:t>
+            </a:r>
+            <a:r>
+              <a:rPr dirty="0" err="1"/>
+              <a:t>una</a:t>
+            </a:r>
+            <a:r>
+              <a:rPr dirty="0"/>
+              <a:t> </a:t>
+            </a:r>
+            <a:r>
+              <a:rPr dirty="0" err="1"/>
+              <a:t>falla</a:t>
+            </a:r>
+            <a:r>
+              <a:rPr dirty="0"/>
+              <a:t> real es </a:t>
+            </a:r>
+            <a:r>
+              <a:rPr dirty="0" err="1"/>
+              <a:t>mucho</a:t>
+            </a:r>
+            <a:r>
+              <a:rPr dirty="0"/>
+              <a:t> </a:t>
+            </a:r>
+            <a:r>
+              <a:rPr dirty="0" err="1"/>
+              <a:t>más</a:t>
+            </a:r>
+            <a:r>
+              <a:rPr dirty="0"/>
+              <a:t> </a:t>
+            </a:r>
+            <a:r>
+              <a:rPr dirty="0" err="1"/>
+              <a:t>caro</a:t>
+            </a:r>
+            <a:r>
+              <a:rPr dirty="0"/>
+              <a:t> </a:t>
+            </a:r>
+            <a:r>
+              <a:rPr dirty="0" err="1"/>
+              <a:t>que</a:t>
+            </a:r>
+            <a:r>
+              <a:rPr dirty="0"/>
+              <a:t> </a:t>
+            </a:r>
+            <a:r>
+              <a:rPr dirty="0" err="1"/>
+              <a:t>una</a:t>
+            </a:r>
+            <a:r>
+              <a:rPr dirty="0"/>
+              <a:t> falsa </a:t>
+            </a:r>
+            <a:r>
+              <a:rPr dirty="0" err="1"/>
+              <a:t>alarma</a:t>
+            </a:r>
+            <a:r>
+              <a:rPr dirty="0"/>
+              <a:t>.</a:t>
             </a:r>
           </a:p>
         </p:txBody>
@@ -1085,7 +1537,286 @@
           <a:lstStyle/>
           <a:p>
             <a:r>
-              <a:t>Trabajamos con 8 variables de entrada: cinco continuas —temperatura de aire y de proceso, velocidad, torque y desgaste de herramienta— y el tipo de producto codificado en tres columnas. El target es binario: falla o no falla. Las clases quedaron prácticamente balanceadas, así que no aplicamos técnicas de balanceo.</a:t>
+              <a:rPr dirty="0" err="1"/>
+              <a:t>Trabajamos</a:t>
+            </a:r>
+            <a:r>
+              <a:rPr dirty="0"/>
+              <a:t> con 8 variables de entrada</a:t>
+            </a:r>
+            <a:r>
+              <a:rPr lang="es-ES" dirty="0"/>
+              <a:t>, donde:</a:t>
+            </a:r>
+          </a:p>
+          <a:p>
+            <a:pPr marL="171450" indent="-171450">
+              <a:buFontTx/>
+              <a:buChar char="-"/>
+            </a:pPr>
+            <a:r>
+              <a:rPr lang="es-ES" dirty="0"/>
+              <a:t>C</a:t>
+            </a:r>
+            <a:r>
+              <a:rPr dirty="0" err="1"/>
+              <a:t>inco</a:t>
+            </a:r>
+            <a:r>
+              <a:rPr lang="es-ES" dirty="0"/>
+              <a:t> son</a:t>
+            </a:r>
+            <a:r>
+              <a:rPr dirty="0"/>
+              <a:t> </a:t>
+            </a:r>
+            <a:r>
+              <a:rPr dirty="0" err="1"/>
+              <a:t>continuas</a:t>
+            </a:r>
+            <a:r>
+              <a:rPr lang="es-ES" dirty="0"/>
+              <a:t>, que son la </a:t>
+            </a:r>
+            <a:r>
+              <a:rPr dirty="0" err="1"/>
+              <a:t>temperatura</a:t>
+            </a:r>
+            <a:r>
+              <a:rPr dirty="0"/>
+              <a:t> de </a:t>
+            </a:r>
+            <a:r>
+              <a:rPr dirty="0" err="1"/>
+              <a:t>aire</a:t>
+            </a:r>
+            <a:r>
+              <a:rPr dirty="0"/>
+              <a:t> y de </a:t>
+            </a:r>
+            <a:r>
+              <a:rPr dirty="0" err="1"/>
+              <a:t>proceso</a:t>
+            </a:r>
+            <a:r>
+              <a:rPr dirty="0"/>
+              <a:t>, </a:t>
+            </a:r>
+            <a:r>
+              <a:rPr dirty="0" err="1"/>
+              <a:t>velocidad</a:t>
+            </a:r>
+            <a:r>
+              <a:rPr dirty="0"/>
+              <a:t>, torque y </a:t>
+            </a:r>
+            <a:r>
+              <a:rPr dirty="0" err="1"/>
+              <a:t>desgaste</a:t>
+            </a:r>
+            <a:r>
+              <a:rPr dirty="0"/>
+              <a:t> de </a:t>
+            </a:r>
+            <a:r>
+              <a:rPr dirty="0" err="1"/>
+              <a:t>herramienta</a:t>
+            </a:r>
+            <a:r>
+              <a:rPr lang="es-ES" dirty="0"/>
+              <a:t>, </a:t>
+            </a:r>
+          </a:p>
+          <a:p>
+            <a:pPr marL="171450" indent="-171450">
+              <a:buFontTx/>
+              <a:buChar char="-"/>
+            </a:pPr>
+            <a:r>
+              <a:rPr lang="es-AR" dirty="0"/>
+              <a:t>Y</a:t>
+            </a:r>
+            <a:r>
+              <a:rPr lang="es-ES" dirty="0"/>
+              <a:t>,</a:t>
+            </a:r>
+            <a:r>
+              <a:rPr dirty="0"/>
+              <a:t> </a:t>
+            </a:r>
+            <a:r>
+              <a:rPr dirty="0" err="1"/>
+              <a:t>el</a:t>
+            </a:r>
+            <a:r>
+              <a:rPr dirty="0"/>
+              <a:t> </a:t>
+            </a:r>
+            <a:r>
+              <a:rPr dirty="0" err="1"/>
+              <a:t>tipo</a:t>
+            </a:r>
+            <a:r>
+              <a:rPr dirty="0"/>
+              <a:t> de </a:t>
+            </a:r>
+            <a:r>
+              <a:rPr dirty="0" err="1"/>
+              <a:t>producto</a:t>
+            </a:r>
+            <a:r>
+              <a:rPr dirty="0"/>
+              <a:t> </a:t>
+            </a:r>
+            <a:r>
+              <a:rPr dirty="0" err="1"/>
+              <a:t>codificado</a:t>
+            </a:r>
+            <a:r>
+              <a:rPr dirty="0"/>
+              <a:t> </a:t>
+            </a:r>
+            <a:r>
+              <a:rPr dirty="0" err="1"/>
+              <a:t>en</a:t>
+            </a:r>
+            <a:r>
+              <a:rPr dirty="0"/>
+              <a:t> </a:t>
+            </a:r>
+            <a:r>
+              <a:rPr dirty="0" err="1"/>
+              <a:t>tres</a:t>
+            </a:r>
+            <a:r>
+              <a:rPr dirty="0"/>
+              <a:t> columnas</a:t>
+            </a:r>
+            <a:r>
+              <a:rPr lang="es-ES" dirty="0"/>
+              <a:t> con One-Hot</a:t>
+            </a:r>
+            <a:r>
+              <a:rPr dirty="0"/>
+              <a:t>. </a:t>
+            </a:r>
+            <a:endParaRPr lang="es-ES" dirty="0"/>
+          </a:p>
+          <a:p>
+            <a:r>
+              <a:rPr dirty="0"/>
+              <a:t>El target es </a:t>
+            </a:r>
+            <a:r>
+              <a:rPr dirty="0" err="1"/>
+              <a:t>binario</a:t>
+            </a:r>
+            <a:r>
+              <a:rPr dirty="0"/>
+              <a:t>: </a:t>
+            </a:r>
+            <a:r>
+              <a:rPr dirty="0" err="1"/>
+              <a:t>falla</a:t>
+            </a:r>
+            <a:r>
+              <a:rPr dirty="0"/>
+              <a:t> o no </a:t>
+            </a:r>
+            <a:r>
+              <a:rPr dirty="0" err="1"/>
+              <a:t>falla</a:t>
+            </a:r>
+            <a:r>
+              <a:rPr dirty="0"/>
+              <a:t>. </a:t>
+            </a:r>
+            <a:endParaRPr lang="es-ES" dirty="0"/>
+          </a:p>
+          <a:p>
+            <a:r>
+              <a:rPr lang="es-ES" dirty="0"/>
+              <a:t>Como se puede apreciar en el gráfico de torta, l</a:t>
+            </a:r>
+            <a:r>
+              <a:rPr dirty="0"/>
+              <a:t>as </a:t>
+            </a:r>
+            <a:r>
+              <a:rPr dirty="0" err="1"/>
+              <a:t>clases</a:t>
+            </a:r>
+            <a:r>
+              <a:rPr dirty="0"/>
+              <a:t> </a:t>
+            </a:r>
+            <a:r>
+              <a:rPr dirty="0" err="1"/>
+              <a:t>quedaron</a:t>
+            </a:r>
+            <a:r>
+              <a:rPr dirty="0"/>
+              <a:t> </a:t>
+            </a:r>
+            <a:r>
+              <a:rPr dirty="0" err="1"/>
+              <a:t>prácticamente</a:t>
+            </a:r>
+            <a:r>
+              <a:rPr dirty="0"/>
+              <a:t> </a:t>
+            </a:r>
+            <a:r>
+              <a:rPr dirty="0" err="1"/>
+              <a:t>balanceadas</a:t>
+            </a:r>
+            <a:r>
+              <a:rPr lang="es-ES" dirty="0"/>
+              <a:t> de forma natural</a:t>
+            </a:r>
+            <a:r>
+              <a:rPr dirty="0"/>
+              <a:t>, </a:t>
+            </a:r>
+            <a:r>
+              <a:rPr dirty="0" err="1"/>
+              <a:t>así</a:t>
+            </a:r>
+            <a:r>
+              <a:rPr dirty="0"/>
+              <a:t> </a:t>
+            </a:r>
+            <a:r>
+              <a:rPr dirty="0" err="1"/>
+              <a:t>que</a:t>
+            </a:r>
+            <a:r>
+              <a:rPr dirty="0"/>
+              <a:t> no </a:t>
+            </a:r>
+            <a:r>
+              <a:rPr dirty="0" err="1"/>
+              <a:t>aplicamos</a:t>
+            </a:r>
+            <a:r>
+              <a:rPr dirty="0"/>
+              <a:t> </a:t>
+            </a:r>
+            <a:r>
+              <a:rPr dirty="0" err="1"/>
+              <a:t>técnicas</a:t>
+            </a:r>
+            <a:r>
+              <a:rPr dirty="0"/>
+              <a:t> de </a:t>
+            </a:r>
+            <a:r>
+              <a:rPr dirty="0" err="1"/>
+              <a:t>balanceo</a:t>
+            </a:r>
+            <a:r>
+              <a:rPr dirty="0"/>
+              <a:t>.</a:t>
             </a:r>
           </a:p>
         </p:txBody>
@@ -1225,7 +1956,247 @@
           <a:lstStyle/>
           <a:p>
             <a:r>
-              <a:t>Reutilizamos el mismo preprocesamiento del TP original: eliminamos outliers, imputamos faltantes, codificamos product_type con One-Hot —porque demostramos que es nominal, no ordinal— y estandarizamos con Z-score. Usar exactamente los mismos datos para todos los modelos es lo que hace justa la comparación que veremos.</a:t>
+              <a:rPr dirty="0" err="1"/>
+              <a:t>Reutilizamos</a:t>
+            </a:r>
+            <a:r>
+              <a:rPr dirty="0"/>
+              <a:t> </a:t>
+            </a:r>
+            <a:r>
+              <a:rPr dirty="0" err="1"/>
+              <a:t>el</a:t>
+            </a:r>
+            <a:r>
+              <a:rPr dirty="0"/>
+              <a:t> </a:t>
+            </a:r>
+            <a:r>
+              <a:rPr dirty="0" err="1"/>
+              <a:t>mismo</a:t>
+            </a:r>
+            <a:r>
+              <a:rPr dirty="0"/>
+              <a:t> </a:t>
+            </a:r>
+            <a:r>
+              <a:rPr dirty="0" err="1"/>
+              <a:t>preprocesamiento</a:t>
+            </a:r>
+            <a:r>
+              <a:rPr dirty="0"/>
+              <a:t> del TP original</a:t>
+            </a:r>
+            <a:r>
+              <a:rPr lang="es-ES" dirty="0"/>
+              <a:t> de CDD</a:t>
+            </a:r>
+            <a:r>
+              <a:rPr dirty="0"/>
+              <a:t>: </a:t>
+            </a:r>
+            <a:r>
+              <a:rPr dirty="0" err="1"/>
+              <a:t>eliminamos</a:t>
+            </a:r>
+            <a:r>
+              <a:rPr dirty="0"/>
+              <a:t> outliers, </a:t>
+            </a:r>
+            <a:r>
+              <a:rPr dirty="0" err="1"/>
+              <a:t>imputamos</a:t>
+            </a:r>
+            <a:r>
+              <a:rPr dirty="0"/>
+              <a:t> </a:t>
+            </a:r>
+            <a:r>
+              <a:rPr lang="es-ES" dirty="0"/>
+              <a:t>datos </a:t>
+            </a:r>
+            <a:r>
+              <a:rPr dirty="0" err="1"/>
+              <a:t>faltantes</a:t>
+            </a:r>
+            <a:r>
+              <a:rPr dirty="0"/>
+              <a:t>, </a:t>
+            </a:r>
+            <a:r>
+              <a:rPr dirty="0" err="1"/>
+              <a:t>codificamos</a:t>
+            </a:r>
+            <a:r>
+              <a:rPr dirty="0"/>
+              <a:t> </a:t>
+            </a:r>
+            <a:r>
+              <a:rPr dirty="0" err="1"/>
+              <a:t>product_type</a:t>
+            </a:r>
+            <a:r>
+              <a:rPr dirty="0"/>
+              <a:t> con One-Hot </a:t>
+            </a:r>
+            <a:r>
+              <a:rPr lang="es-ES" dirty="0"/>
+              <a:t>(</a:t>
+            </a:r>
+            <a:r>
+              <a:rPr dirty="0" err="1"/>
+              <a:t>porque</a:t>
+            </a:r>
+            <a:r>
+              <a:rPr dirty="0"/>
+              <a:t> </a:t>
+            </a:r>
+            <a:r>
+              <a:rPr lang="es-ES" dirty="0"/>
+              <a:t>consideramos </a:t>
+            </a:r>
+            <a:r>
+              <a:rPr dirty="0" err="1"/>
+              <a:t>que</a:t>
+            </a:r>
+            <a:r>
+              <a:rPr dirty="0"/>
+              <a:t> es nominal, no ordinal</a:t>
+            </a:r>
+            <a:r>
+              <a:rPr lang="es-ES" dirty="0"/>
+              <a:t>) </a:t>
+            </a:r>
+            <a:r>
+              <a:rPr dirty="0"/>
+              <a:t>y </a:t>
+            </a:r>
+            <a:r>
+              <a:rPr dirty="0" err="1"/>
+              <a:t>estandarizamos</a:t>
+            </a:r>
+            <a:r>
+              <a:rPr dirty="0"/>
+              <a:t> con Z-score. </a:t>
+            </a:r>
+            <a:endParaRPr lang="es-ES" dirty="0"/>
+          </a:p>
+          <a:p>
+            <a:r>
+              <a:rPr lang="es-ES" dirty="0"/>
+              <a:t>Se usan </a:t>
+            </a:r>
+            <a:r>
+              <a:rPr dirty="0" err="1"/>
+              <a:t>exactamente</a:t>
+            </a:r>
+            <a:r>
+              <a:rPr dirty="0"/>
+              <a:t> </a:t>
+            </a:r>
+            <a:r>
+              <a:rPr dirty="0" err="1"/>
+              <a:t>los</a:t>
+            </a:r>
+            <a:r>
+              <a:rPr dirty="0"/>
+              <a:t> </a:t>
+            </a:r>
+            <a:r>
+              <a:rPr dirty="0" err="1"/>
+              <a:t>mismos</a:t>
+            </a:r>
+            <a:r>
+              <a:rPr dirty="0"/>
+              <a:t> </a:t>
+            </a:r>
+            <a:r>
+              <a:rPr dirty="0" err="1"/>
+              <a:t>datos</a:t>
+            </a:r>
+            <a:r>
+              <a:rPr dirty="0"/>
+              <a:t> para </a:t>
+            </a:r>
+            <a:r>
+              <a:rPr dirty="0" err="1"/>
+              <a:t>todos</a:t>
+            </a:r>
+            <a:r>
+              <a:rPr dirty="0"/>
+              <a:t> </a:t>
+            </a:r>
+            <a:r>
+              <a:rPr dirty="0" err="1"/>
+              <a:t>los</a:t>
+            </a:r>
+            <a:r>
+              <a:rPr dirty="0"/>
+              <a:t> </a:t>
+            </a:r>
+            <a:r>
+              <a:rPr dirty="0" err="1"/>
+              <a:t>modelos</a:t>
+            </a:r>
+            <a:r>
+              <a:rPr lang="es-ES" dirty="0"/>
+              <a:t>,</a:t>
+            </a:r>
+            <a:r>
+              <a:rPr dirty="0"/>
+              <a:t> lo </a:t>
+            </a:r>
+            <a:r>
+              <a:rPr dirty="0" err="1"/>
+              <a:t>que</a:t>
+            </a:r>
+            <a:r>
+              <a:rPr dirty="0"/>
+              <a:t> </a:t>
+            </a:r>
+            <a:r>
+              <a:rPr dirty="0" err="1"/>
+              <a:t>hace</a:t>
+            </a:r>
+            <a:r>
+              <a:rPr dirty="0"/>
+              <a:t> </a:t>
+            </a:r>
+            <a:r>
+              <a:rPr dirty="0" err="1"/>
+              <a:t>justa</a:t>
+            </a:r>
+            <a:r>
+              <a:rPr dirty="0"/>
+              <a:t> la </a:t>
+            </a:r>
+            <a:r>
+              <a:rPr dirty="0" err="1"/>
+              <a:t>comparación</a:t>
+            </a:r>
+            <a:r>
+              <a:rPr dirty="0"/>
+              <a:t> </a:t>
+            </a:r>
+            <a:r>
+              <a:rPr dirty="0" err="1"/>
+              <a:t>que</a:t>
+            </a:r>
+            <a:r>
+              <a:rPr dirty="0"/>
+              <a:t> </a:t>
+            </a:r>
+            <a:r>
+              <a:rPr dirty="0" err="1"/>
+              <a:t>veremos</a:t>
+            </a:r>
+            <a:r>
+              <a:rPr lang="es-ES" dirty="0"/>
+              <a:t> entre ellos</a:t>
+            </a:r>
+            <a:r>
+              <a:rPr dirty="0"/>
+              <a:t>.</a:t>
             </a:r>
           </a:p>
         </p:txBody>
@@ -1295,7 +2266,283 @@
           <a:lstStyle/>
           <a:p>
             <a:r>
-              <a:t>¿Por qué un Perceptrón Multicapa? Porque, a diferencia de los modelos lineales, aprende relaciones no lineales entre variables, y en el EDA vimos interacciones complejas: el torque bajo dispara la falla, la velocidad alta también, y el efecto depende del tipo de producto. El MLP puede capturar esas combinaciones sin que se las indiquemos.</a:t>
+              <a:rPr dirty="0"/>
+              <a:t>¿Por </a:t>
+            </a:r>
+            <a:r>
+              <a:rPr dirty="0" err="1"/>
+              <a:t>qué</a:t>
+            </a:r>
+            <a:r>
+              <a:rPr dirty="0"/>
+              <a:t> un </a:t>
+            </a:r>
+            <a:r>
+              <a:rPr dirty="0" err="1"/>
+              <a:t>Perceptrón</a:t>
+            </a:r>
+            <a:r>
+              <a:rPr dirty="0"/>
+              <a:t> </a:t>
+            </a:r>
+            <a:r>
+              <a:rPr dirty="0" err="1"/>
+              <a:t>Multicapa</a:t>
+            </a:r>
+            <a:r>
+              <a:rPr dirty="0"/>
+              <a:t>? </a:t>
+            </a:r>
+            <a:r>
+              <a:rPr dirty="0" err="1"/>
+              <a:t>Porque</a:t>
+            </a:r>
+            <a:r>
+              <a:rPr dirty="0"/>
+              <a:t>, a </a:t>
+            </a:r>
+            <a:r>
+              <a:rPr dirty="0" err="1"/>
+              <a:t>diferencia</a:t>
+            </a:r>
+            <a:r>
+              <a:rPr dirty="0"/>
+              <a:t> de </a:t>
+            </a:r>
+            <a:r>
+              <a:rPr dirty="0" err="1"/>
+              <a:t>los</a:t>
+            </a:r>
+            <a:r>
+              <a:rPr dirty="0"/>
+              <a:t> </a:t>
+            </a:r>
+            <a:r>
+              <a:rPr dirty="0" err="1"/>
+              <a:t>modelos</a:t>
+            </a:r>
+            <a:r>
+              <a:rPr dirty="0"/>
+              <a:t> </a:t>
+            </a:r>
+            <a:r>
+              <a:rPr dirty="0" err="1"/>
+              <a:t>lineales</a:t>
+            </a:r>
+            <a:r>
+              <a:rPr dirty="0"/>
+              <a:t>, </a:t>
+            </a:r>
+            <a:r>
+              <a:rPr dirty="0" err="1"/>
+              <a:t>aprende</a:t>
+            </a:r>
+            <a:r>
+              <a:rPr dirty="0"/>
+              <a:t> </a:t>
+            </a:r>
+            <a:r>
+              <a:rPr dirty="0" err="1"/>
+              <a:t>relaciones</a:t>
+            </a:r>
+            <a:r>
+              <a:rPr dirty="0"/>
+              <a:t> no </a:t>
+            </a:r>
+            <a:r>
+              <a:rPr dirty="0" err="1"/>
+              <a:t>lineales</a:t>
+            </a:r>
+            <a:r>
+              <a:rPr dirty="0"/>
+              <a:t> entre variables, y </a:t>
+            </a:r>
+            <a:r>
+              <a:rPr dirty="0" err="1"/>
+              <a:t>en</a:t>
+            </a:r>
+            <a:r>
+              <a:rPr dirty="0"/>
+              <a:t> </a:t>
+            </a:r>
+            <a:r>
+              <a:rPr dirty="0" err="1"/>
+              <a:t>el</a:t>
+            </a:r>
+            <a:r>
+              <a:rPr dirty="0"/>
+              <a:t> </a:t>
+            </a:r>
+            <a:r>
+              <a:rPr lang="es-ES" dirty="0"/>
+              <a:t>Análisis Exploratorio de Datos </a:t>
+            </a:r>
+            <a:r>
+              <a:rPr dirty="0" err="1"/>
+              <a:t>vimos</a:t>
+            </a:r>
+            <a:r>
+              <a:rPr dirty="0"/>
+              <a:t> </a:t>
+            </a:r>
+            <a:r>
+              <a:rPr dirty="0" err="1"/>
+              <a:t>interacciones</a:t>
+            </a:r>
+            <a:r>
+              <a:rPr dirty="0"/>
+              <a:t> </a:t>
+            </a:r>
+            <a:r>
+              <a:rPr dirty="0" err="1"/>
+              <a:t>complejas</a:t>
+            </a:r>
+            <a:r>
+              <a:rPr lang="es-ES" dirty="0"/>
+              <a:t> como que</a:t>
+            </a:r>
+            <a:r>
+              <a:rPr dirty="0"/>
+              <a:t> </a:t>
+            </a:r>
+            <a:r>
+              <a:rPr dirty="0" err="1"/>
+              <a:t>el</a:t>
+            </a:r>
+            <a:r>
+              <a:rPr dirty="0"/>
+              <a:t> torque bajo </a:t>
+            </a:r>
+            <a:r>
+              <a:rPr dirty="0" err="1"/>
+              <a:t>dispara</a:t>
+            </a:r>
+            <a:r>
+              <a:rPr dirty="0"/>
+              <a:t> la </a:t>
+            </a:r>
+            <a:r>
+              <a:rPr dirty="0" err="1"/>
+              <a:t>falla</a:t>
+            </a:r>
+            <a:r>
+              <a:rPr dirty="0"/>
+              <a:t>, la </a:t>
+            </a:r>
+            <a:r>
+              <a:rPr dirty="0" err="1"/>
+              <a:t>velocidad</a:t>
+            </a:r>
+            <a:r>
+              <a:rPr dirty="0"/>
+              <a:t> </a:t>
+            </a:r>
+            <a:r>
+              <a:rPr dirty="0" err="1"/>
+              <a:t>alta</a:t>
+            </a:r>
+            <a:r>
+              <a:rPr dirty="0"/>
+              <a:t> también, y </a:t>
+            </a:r>
+            <a:r>
+              <a:rPr dirty="0" err="1"/>
+              <a:t>el</a:t>
+            </a:r>
+            <a:r>
+              <a:rPr dirty="0"/>
+              <a:t> </a:t>
+            </a:r>
+            <a:r>
+              <a:rPr dirty="0" err="1"/>
+              <a:t>efecto</a:t>
+            </a:r>
+            <a:r>
+              <a:rPr dirty="0"/>
+              <a:t> </a:t>
+            </a:r>
+            <a:r>
+              <a:rPr dirty="0" err="1"/>
+              <a:t>depende</a:t>
+            </a:r>
+            <a:r>
+              <a:rPr dirty="0"/>
+              <a:t> del </a:t>
+            </a:r>
+            <a:r>
+              <a:rPr dirty="0" err="1"/>
+              <a:t>tipo</a:t>
+            </a:r>
+            <a:r>
+              <a:rPr dirty="0"/>
+              <a:t> de </a:t>
+            </a:r>
+            <a:r>
+              <a:rPr dirty="0" err="1"/>
+              <a:t>producto</a:t>
+            </a:r>
+            <a:r>
+              <a:rPr dirty="0"/>
+              <a:t>. </a:t>
+            </a:r>
+            <a:endParaRPr lang="es-ES" dirty="0"/>
+          </a:p>
+          <a:p>
+            <a:r>
+              <a:rPr dirty="0"/>
+              <a:t>El MLP </a:t>
+            </a:r>
+            <a:r>
+              <a:rPr dirty="0" err="1"/>
+              <a:t>puede</a:t>
+            </a:r>
+            <a:r>
+              <a:rPr dirty="0"/>
+              <a:t> </a:t>
+            </a:r>
+            <a:r>
+              <a:rPr dirty="0" err="1"/>
+              <a:t>capturar</a:t>
+            </a:r>
+            <a:r>
+              <a:rPr dirty="0"/>
+              <a:t> </a:t>
+            </a:r>
+            <a:r>
+              <a:rPr dirty="0" err="1"/>
+              <a:t>esas</a:t>
+            </a:r>
+            <a:r>
+              <a:rPr dirty="0"/>
+              <a:t> </a:t>
+            </a:r>
+            <a:r>
+              <a:rPr dirty="0" err="1"/>
+              <a:t>combinaciones</a:t>
+            </a:r>
+            <a:r>
+              <a:rPr dirty="0"/>
+              <a:t> sin </a:t>
+            </a:r>
+            <a:r>
+              <a:rPr dirty="0" err="1"/>
+              <a:t>que</a:t>
+            </a:r>
+            <a:r>
+              <a:rPr dirty="0"/>
+              <a:t> se las </a:t>
+            </a:r>
+            <a:r>
+              <a:rPr dirty="0" err="1"/>
+              <a:t>indiquemos</a:t>
+            </a:r>
+            <a:r>
+              <a:rPr lang="es-ES" dirty="0"/>
+              <a:t> explícitamente</a:t>
+            </a:r>
+            <a:r>
+              <a:rPr dirty="0"/>
+              <a:t>.</a:t>
             </a:r>
           </a:p>
         </p:txBody>
@@ -1365,7 +2612,238 @@
           <a:lstStyle/>
           <a:p>
             <a:r>
-              <a:t>Diseñamos con una idea clave: simplicidad acorde al problema. Con solo 8 features, una red muy profunda solo agregaría sobreajuste. Optamos por una arquitectura en embudo: la red comprime progresivamente la información, quedándose con los patrones que anticipan la falla. Lo concreto lo explica mi compañero.</a:t>
+              <a:rPr lang="es-ES" dirty="0"/>
+              <a:t>El modelo fue diseñado considerando una</a:t>
+            </a:r>
+            <a:r>
+              <a:rPr dirty="0"/>
+              <a:t> </a:t>
+            </a:r>
+            <a:r>
+              <a:rPr dirty="0" err="1"/>
+              <a:t>simplicidad</a:t>
+            </a:r>
+            <a:r>
+              <a:rPr dirty="0"/>
+              <a:t> </a:t>
+            </a:r>
+            <a:r>
+              <a:rPr dirty="0" err="1"/>
+              <a:t>acorde</a:t>
+            </a:r>
+            <a:r>
+              <a:rPr dirty="0"/>
+              <a:t> al </a:t>
+            </a:r>
+            <a:r>
+              <a:rPr dirty="0" err="1"/>
+              <a:t>problema</a:t>
+            </a:r>
+            <a:r>
+              <a:rPr dirty="0"/>
+              <a:t>. Con solo 8 </a:t>
+            </a:r>
+            <a:r>
+              <a:rPr lang="es-ES" dirty="0"/>
+              <a:t>características</a:t>
+            </a:r>
+            <a:r>
+              <a:rPr dirty="0"/>
+              <a:t>, </a:t>
+            </a:r>
+            <a:r>
+              <a:rPr dirty="0" err="1"/>
+              <a:t>una</a:t>
+            </a:r>
+            <a:r>
+              <a:rPr dirty="0"/>
+              <a:t> red </a:t>
+            </a:r>
+            <a:r>
+              <a:rPr dirty="0" err="1"/>
+              <a:t>muy</a:t>
+            </a:r>
+            <a:r>
+              <a:rPr dirty="0"/>
+              <a:t> profunda solo </a:t>
+            </a:r>
+            <a:r>
+              <a:rPr dirty="0" err="1"/>
+              <a:t>agregaría</a:t>
+            </a:r>
+            <a:r>
+              <a:rPr dirty="0"/>
+              <a:t> </a:t>
+            </a:r>
+            <a:r>
+              <a:rPr dirty="0" err="1"/>
+              <a:t>sobreajuste</a:t>
+            </a:r>
+            <a:r>
+              <a:rPr dirty="0"/>
+              <a:t>. </a:t>
+            </a:r>
+            <a:endParaRPr lang="es-ES" dirty="0"/>
+          </a:p>
+          <a:p>
+            <a:r>
+              <a:rPr lang="es-ES" dirty="0"/>
+              <a:t>Entonces, o</a:t>
+            </a:r>
+            <a:r>
+              <a:rPr dirty="0" err="1"/>
+              <a:t>ptamos</a:t>
+            </a:r>
+            <a:r>
+              <a:rPr dirty="0"/>
+              <a:t> </a:t>
+            </a:r>
+            <a:r>
+              <a:rPr dirty="0" err="1"/>
+              <a:t>por</a:t>
+            </a:r>
+            <a:r>
+              <a:rPr dirty="0"/>
+              <a:t> </a:t>
+            </a:r>
+            <a:r>
+              <a:rPr dirty="0" err="1"/>
+              <a:t>una</a:t>
+            </a:r>
+            <a:r>
+              <a:rPr dirty="0"/>
+              <a:t> arquitectura </a:t>
+            </a:r>
+            <a:r>
+              <a:rPr dirty="0" err="1"/>
+              <a:t>en</a:t>
+            </a:r>
+            <a:r>
+              <a:rPr dirty="0"/>
+              <a:t> </a:t>
+            </a:r>
+            <a:r>
+              <a:rPr dirty="0" err="1"/>
+              <a:t>embudo</a:t>
+            </a:r>
+            <a:r>
+              <a:rPr dirty="0"/>
+              <a:t>: la red </a:t>
+            </a:r>
+            <a:r>
+              <a:rPr dirty="0" err="1"/>
+              <a:t>comprime</a:t>
+            </a:r>
+            <a:r>
+              <a:rPr dirty="0"/>
+              <a:t> </a:t>
+            </a:r>
+            <a:r>
+              <a:rPr dirty="0" err="1"/>
+              <a:t>progresivamente</a:t>
+            </a:r>
+            <a:r>
+              <a:rPr dirty="0"/>
+              <a:t> la </a:t>
+            </a:r>
+            <a:r>
+              <a:rPr dirty="0" err="1"/>
+              <a:t>información</a:t>
+            </a:r>
+            <a:r>
+              <a:rPr dirty="0"/>
+              <a:t>, </a:t>
+            </a:r>
+            <a:r>
+              <a:rPr dirty="0" err="1"/>
+              <a:t>quedándose</a:t>
+            </a:r>
+            <a:r>
+              <a:rPr dirty="0"/>
+              <a:t> con </a:t>
+            </a:r>
+            <a:r>
+              <a:rPr dirty="0" err="1"/>
+              <a:t>los</a:t>
+            </a:r>
+            <a:r>
+              <a:rPr dirty="0"/>
+              <a:t> </a:t>
+            </a:r>
+            <a:r>
+              <a:rPr dirty="0" err="1"/>
+              <a:t>patrones</a:t>
+            </a:r>
+            <a:r>
+              <a:rPr dirty="0"/>
+              <a:t> </a:t>
+            </a:r>
+            <a:r>
+              <a:rPr dirty="0" err="1"/>
+              <a:t>que</a:t>
+            </a:r>
+            <a:r>
+              <a:rPr dirty="0"/>
+              <a:t> </a:t>
+            </a:r>
+            <a:r>
+              <a:rPr dirty="0" err="1"/>
+              <a:t>anticipan</a:t>
+            </a:r>
+            <a:r>
+              <a:rPr dirty="0"/>
+              <a:t> la </a:t>
+            </a:r>
+            <a:r>
+              <a:rPr dirty="0" err="1"/>
+              <a:t>falla</a:t>
+            </a:r>
+            <a:r>
+              <a:rPr dirty="0"/>
+              <a:t>. </a:t>
+            </a:r>
+            <a:endParaRPr lang="es-ES" dirty="0"/>
+          </a:p>
+          <a:p>
+            <a:r>
+              <a:rPr dirty="0"/>
+              <a:t>Lo </a:t>
+            </a:r>
+            <a:r>
+              <a:rPr dirty="0" err="1"/>
+              <a:t>concreto</a:t>
+            </a:r>
+            <a:r>
+              <a:rPr dirty="0"/>
+              <a:t> lo </a:t>
+            </a:r>
+            <a:r>
+              <a:rPr dirty="0" err="1"/>
+              <a:t>explica</a:t>
+            </a:r>
+            <a:r>
+              <a:rPr lang="es-ES" dirty="0" err="1"/>
+              <a:t>rá</a:t>
+            </a:r>
+            <a:r>
+              <a:rPr lang="es-ES" dirty="0"/>
+              <a:t> </a:t>
+            </a:r>
+            <a:r>
+              <a:rPr dirty="0"/>
+              <a:t>mi </a:t>
+            </a:r>
+            <a:r>
+              <a:rPr dirty="0" err="1"/>
+              <a:t>compañero</a:t>
+            </a:r>
+            <a:r>
+              <a:rPr lang="es-ES" dirty="0"/>
+              <a:t> a continuación</a:t>
+            </a:r>
+            <a:r>
+              <a:rPr dirty="0"/>
+              <a:t>.</a:t>
             </a:r>
           </a:p>
         </p:txBody>
@@ -1849,7 +3327,7 @@
           <a:p>
             <a:fld id="{5BCAD085-E8A6-8845-BD4E-CB4CCA059FC4}" type="datetimeFigureOut">
               <a:rPr lang="en-US" smtClean="0"/>
-              <a:t>6/14/2026</a:t>
+              <a:t>6/16/2026</a:t>
             </a:fld>
             <a:endParaRPr lang="en-US"/>
           </a:p>
@@ -2017,7 +3495,7 @@
           <a:p>
             <a:fld id="{5BCAD085-E8A6-8845-BD4E-CB4CCA059FC4}" type="datetimeFigureOut">
               <a:rPr lang="en-US" smtClean="0"/>
-              <a:t>6/14/2026</a:t>
+              <a:t>6/16/2026</a:t>
             </a:fld>
             <a:endParaRPr lang="en-US"/>
           </a:p>
@@ -2195,7 +3673,7 @@
           <a:p>
             <a:fld id="{5BCAD085-E8A6-8845-BD4E-CB4CCA059FC4}" type="datetimeFigureOut">
               <a:rPr lang="en-US" smtClean="0"/>
-              <a:t>6/14/2026</a:t>
+              <a:t>6/16/2026</a:t>
             </a:fld>
             <a:endParaRPr lang="en-US"/>
           </a:p>
@@ -2363,7 +3841,7 @@
           <a:p>
             <a:fld id="{5BCAD085-E8A6-8845-BD4E-CB4CCA059FC4}" type="datetimeFigureOut">
               <a:rPr lang="en-US" smtClean="0"/>
-              <a:t>6/14/2026</a:t>
+              <a:t>6/16/2026</a:t>
             </a:fld>
             <a:endParaRPr lang="en-US"/>
           </a:p>
@@ -2608,7 +4086,7 @@
           <a:p>
             <a:fld id="{5BCAD085-E8A6-8845-BD4E-CB4CCA059FC4}" type="datetimeFigureOut">
               <a:rPr lang="en-US" smtClean="0"/>
-              <a:t>6/14/2026</a:t>
+              <a:t>6/16/2026</a:t>
             </a:fld>
             <a:endParaRPr lang="en-US"/>
           </a:p>
@@ -2893,7 +4371,7 @@
           <a:p>
             <a:fld id="{5BCAD085-E8A6-8845-BD4E-CB4CCA059FC4}" type="datetimeFigureOut">
               <a:rPr lang="en-US" smtClean="0"/>
-              <a:t>6/14/2026</a:t>
+              <a:t>6/16/2026</a:t>
             </a:fld>
             <a:endParaRPr lang="en-US"/>
           </a:p>
@@ -3312,7 +4790,7 @@
           <a:p>
             <a:fld id="{5BCAD085-E8A6-8845-BD4E-CB4CCA059FC4}" type="datetimeFigureOut">
               <a:rPr lang="en-US" smtClean="0"/>
-              <a:t>6/14/2026</a:t>
+              <a:t>6/16/2026</a:t>
             </a:fld>
             <a:endParaRPr lang="en-US"/>
           </a:p>
@@ -3429,7 +4907,7 @@
           <a:p>
             <a:fld id="{5BCAD085-E8A6-8845-BD4E-CB4CCA059FC4}" type="datetimeFigureOut">
               <a:rPr lang="en-US" smtClean="0"/>
-              <a:t>6/14/2026</a:t>
+              <a:t>6/16/2026</a:t>
             </a:fld>
             <a:endParaRPr lang="en-US"/>
           </a:p>
@@ -3524,7 +5002,7 @@
           <a:p>
             <a:fld id="{5BCAD085-E8A6-8845-BD4E-CB4CCA059FC4}" type="datetimeFigureOut">
               <a:rPr lang="en-US" smtClean="0"/>
-              <a:t>6/14/2026</a:t>
+              <a:t>6/16/2026</a:t>
             </a:fld>
             <a:endParaRPr lang="en-US"/>
           </a:p>
@@ -3799,7 +5277,7 @@
           <a:p>
             <a:fld id="{5BCAD085-E8A6-8845-BD4E-CB4CCA059FC4}" type="datetimeFigureOut">
               <a:rPr lang="en-US" smtClean="0"/>
-              <a:t>6/14/2026</a:t>
+              <a:t>6/16/2026</a:t>
             </a:fld>
             <a:endParaRPr lang="en-US"/>
           </a:p>
@@ -4051,7 +5529,7 @@
           <a:p>
             <a:fld id="{5BCAD085-E8A6-8845-BD4E-CB4CCA059FC4}" type="datetimeFigureOut">
               <a:rPr lang="en-US" smtClean="0"/>
-              <a:t>6/14/2026</a:t>
+              <a:t>6/16/2026</a:t>
             </a:fld>
             <a:endParaRPr lang="en-US"/>
           </a:p>
@@ -4262,7 +5740,7 @@
           <a:p>
             <a:fld id="{5BCAD085-E8A6-8845-BD4E-CB4CCA059FC4}" type="datetimeFigureOut">
               <a:rPr lang="en-US" smtClean="0"/>
-              <a:t>6/14/2026</a:t>
+              <a:t>6/16/2026</a:t>
             </a:fld>
             <a:endParaRPr lang="en-US"/>
           </a:p>
@@ -5038,7 +6516,7 @@
   <p:clrMapOvr>
     <a:masterClrMapping/>
   </p:clrMapOvr>
-  <p:transition advTm="20000"/>
+  <p:transition/>
 </p:sld>
 </file>
 
@@ -5144,49 +6622,14 @@
       </p:sp>
       <p:sp>
         <p:nvSpPr>
-          <p:cNvPr id="4" name="TextBox 3"/>
-          <p:cNvSpPr txBox="1"/>
-          <p:nvPr/>
-        </p:nvSpPr>
-        <p:spPr>
-          <a:xfrm>
-            <a:off x="457200" y="6446520"/>
-            <a:ext cx="11247120" cy="320040"/>
-          </a:xfrm>
-          <a:prstGeom prst="rect">
-            <a:avLst/>
-          </a:prstGeom>
-          <a:noFill/>
-        </p:spPr>
-        <p:txBody>
-          <a:bodyPr wrap="square" anchor="t">
-            <a:spAutoFit/>
-          </a:bodyPr>
-          <a:lstStyle/>
-          <a:p>
-            <a:pPr algn="l"/>
-            <a:r>
-              <a:rPr sz="1000">
-                <a:solidFill>
-                  <a:srgbClr val="6B7480"/>
-                </a:solidFill>
-                <a:latin typeface="Segoe UI"/>
-              </a:rPr>
-              <a:t>Integrante 2</a:t>
-            </a:r>
-          </a:p>
-        </p:txBody>
-      </p:sp>
-      <p:sp>
-        <p:nvSpPr>
           <p:cNvPr id="5" name="TextBox 4"/>
           <p:cNvSpPr txBox="1"/>
           <p:nvPr/>
         </p:nvSpPr>
         <p:spPr>
           <a:xfrm>
-            <a:off x="457200" y="6446520"/>
-            <a:ext cx="11247120" cy="320040"/>
+            <a:off x="945572" y="6446520"/>
+            <a:ext cx="10758747" cy="246221"/>
           </a:xfrm>
           <a:prstGeom prst="rect">
             <a:avLst/>
@@ -5333,7 +6776,7 @@
   <p:clrMapOvr>
     <a:masterClrMapping/>
   </p:clrMapOvr>
-  <p:transition advTm="20000"/>
+  <p:transition/>
 </p:sld>
 </file>
 
@@ -5439,49 +6882,14 @@
       </p:sp>
       <p:sp>
         <p:nvSpPr>
-          <p:cNvPr id="4" name="TextBox 3"/>
-          <p:cNvSpPr txBox="1"/>
-          <p:nvPr/>
-        </p:nvSpPr>
-        <p:spPr>
-          <a:xfrm>
-            <a:off x="457200" y="6446520"/>
-            <a:ext cx="11247120" cy="320040"/>
-          </a:xfrm>
-          <a:prstGeom prst="rect">
-            <a:avLst/>
-          </a:prstGeom>
-          <a:noFill/>
-        </p:spPr>
-        <p:txBody>
-          <a:bodyPr wrap="square" anchor="t">
-            <a:spAutoFit/>
-          </a:bodyPr>
-          <a:lstStyle/>
-          <a:p>
-            <a:pPr algn="l"/>
-            <a:r>
-              <a:rPr sz="1000">
-                <a:solidFill>
-                  <a:srgbClr val="6B7480"/>
-                </a:solidFill>
-                <a:latin typeface="Segoe UI"/>
-              </a:rPr>
-              <a:t>Integrante 3</a:t>
-            </a:r>
-          </a:p>
-        </p:txBody>
-      </p:sp>
-      <p:sp>
-        <p:nvSpPr>
           <p:cNvPr id="5" name="TextBox 4"/>
           <p:cNvSpPr txBox="1"/>
           <p:nvPr/>
         </p:nvSpPr>
         <p:spPr>
           <a:xfrm>
-            <a:off x="457200" y="6446520"/>
-            <a:ext cx="11247120" cy="320040"/>
+            <a:off x="987136" y="6446520"/>
+            <a:ext cx="10717184" cy="246221"/>
           </a:xfrm>
           <a:prstGeom prst="rect">
             <a:avLst/>
@@ -5644,7 +7052,7 @@
   <p:clrMapOvr>
     <a:masterClrMapping/>
   </p:clrMapOvr>
-  <p:transition advTm="20000"/>
+  <p:transition/>
 </p:sld>
 </file>
 
@@ -5750,49 +7158,14 @@
       </p:sp>
       <p:sp>
         <p:nvSpPr>
-          <p:cNvPr id="4" name="TextBox 3"/>
-          <p:cNvSpPr txBox="1"/>
-          <p:nvPr/>
-        </p:nvSpPr>
-        <p:spPr>
-          <a:xfrm>
-            <a:off x="457200" y="6446520"/>
-            <a:ext cx="11247120" cy="320040"/>
-          </a:xfrm>
-          <a:prstGeom prst="rect">
-            <a:avLst/>
-          </a:prstGeom>
-          <a:noFill/>
-        </p:spPr>
-        <p:txBody>
-          <a:bodyPr wrap="square" anchor="t">
-            <a:spAutoFit/>
-          </a:bodyPr>
-          <a:lstStyle/>
-          <a:p>
-            <a:pPr algn="l"/>
-            <a:r>
-              <a:rPr sz="1000">
-                <a:solidFill>
-                  <a:srgbClr val="6B7480"/>
-                </a:solidFill>
-                <a:latin typeface="Segoe UI"/>
-              </a:rPr>
-              <a:t>Integrante 3</a:t>
-            </a:r>
-          </a:p>
-        </p:txBody>
-      </p:sp>
-      <p:sp>
-        <p:nvSpPr>
           <p:cNvPr id="5" name="TextBox 4"/>
           <p:cNvSpPr txBox="1"/>
           <p:nvPr/>
         </p:nvSpPr>
         <p:spPr>
           <a:xfrm>
-            <a:off x="457200" y="6446520"/>
-            <a:ext cx="11247120" cy="320040"/>
+            <a:off x="1433944" y="6446520"/>
+            <a:ext cx="10270375" cy="246221"/>
           </a:xfrm>
           <a:prstGeom prst="rect">
             <a:avLst/>
@@ -6050,7 +7423,7 @@
   <p:clrMapOvr>
     <a:masterClrMapping/>
   </p:clrMapOvr>
-  <p:transition advTm="20000"/>
+  <p:transition/>
 </p:sld>
 </file>
 
@@ -6156,49 +7529,14 @@
       </p:sp>
       <p:sp>
         <p:nvSpPr>
-          <p:cNvPr id="4" name="TextBox 3"/>
-          <p:cNvSpPr txBox="1"/>
-          <p:nvPr/>
-        </p:nvSpPr>
-        <p:spPr>
-          <a:xfrm>
-            <a:off x="457200" y="6446520"/>
-            <a:ext cx="11247120" cy="320040"/>
-          </a:xfrm>
-          <a:prstGeom prst="rect">
-            <a:avLst/>
-          </a:prstGeom>
-          <a:noFill/>
-        </p:spPr>
-        <p:txBody>
-          <a:bodyPr wrap="square" anchor="t">
-            <a:spAutoFit/>
-          </a:bodyPr>
-          <a:lstStyle/>
-          <a:p>
-            <a:pPr algn="l"/>
-            <a:r>
-              <a:rPr sz="1000">
-                <a:solidFill>
-                  <a:srgbClr val="6B7480"/>
-                </a:solidFill>
-                <a:latin typeface="Segoe UI"/>
-              </a:rPr>
-              <a:t>Integrante 3</a:t>
-            </a:r>
-          </a:p>
-        </p:txBody>
-      </p:sp>
-      <p:sp>
-        <p:nvSpPr>
           <p:cNvPr id="5" name="TextBox 4"/>
           <p:cNvSpPr txBox="1"/>
           <p:nvPr/>
         </p:nvSpPr>
         <p:spPr>
           <a:xfrm>
-            <a:off x="457200" y="6446520"/>
-            <a:ext cx="11247120" cy="320040"/>
+            <a:off x="1153390" y="6446520"/>
+            <a:ext cx="10550929" cy="246221"/>
           </a:xfrm>
           <a:prstGeom prst="rect">
             <a:avLst/>
@@ -6706,7 +8044,7 @@
   <p:clrMapOvr>
     <a:masterClrMapping/>
   </p:clrMapOvr>
-  <p:transition advTm="20000"/>
+  <p:transition/>
 </p:sld>
 </file>
 
@@ -6812,49 +8150,14 @@
       </p:sp>
       <p:sp>
         <p:nvSpPr>
-          <p:cNvPr id="4" name="TextBox 3"/>
-          <p:cNvSpPr txBox="1"/>
-          <p:nvPr/>
-        </p:nvSpPr>
-        <p:spPr>
-          <a:xfrm>
-            <a:off x="457200" y="6446520"/>
-            <a:ext cx="11247120" cy="320040"/>
-          </a:xfrm>
-          <a:prstGeom prst="rect">
-            <a:avLst/>
-          </a:prstGeom>
-          <a:noFill/>
-        </p:spPr>
-        <p:txBody>
-          <a:bodyPr wrap="square" anchor="t">
-            <a:spAutoFit/>
-          </a:bodyPr>
-          <a:lstStyle/>
-          <a:p>
-            <a:pPr algn="l"/>
-            <a:r>
-              <a:rPr sz="1000">
-                <a:solidFill>
-                  <a:srgbClr val="6B7480"/>
-                </a:solidFill>
-                <a:latin typeface="Segoe UI"/>
-              </a:rPr>
-              <a:t>Integrante 3</a:t>
-            </a:r>
-          </a:p>
-        </p:txBody>
-      </p:sp>
-      <p:sp>
-        <p:nvSpPr>
           <p:cNvPr id="5" name="TextBox 4"/>
           <p:cNvSpPr txBox="1"/>
           <p:nvPr/>
         </p:nvSpPr>
         <p:spPr>
           <a:xfrm>
-            <a:off x="457200" y="6446520"/>
-            <a:ext cx="11247120" cy="320040"/>
+            <a:off x="1423554" y="6446520"/>
+            <a:ext cx="10280765" cy="246221"/>
           </a:xfrm>
           <a:prstGeom prst="rect">
             <a:avLst/>
@@ -7098,7 +8401,7 @@
   <p:clrMapOvr>
     <a:masterClrMapping/>
   </p:clrMapOvr>
-  <p:transition advTm="20000"/>
+  <p:transition/>
 </p:sld>
 </file>
 
@@ -7204,49 +8507,14 @@
       </p:sp>
       <p:sp>
         <p:nvSpPr>
-          <p:cNvPr id="4" name="TextBox 3"/>
-          <p:cNvSpPr txBox="1"/>
-          <p:nvPr/>
-        </p:nvSpPr>
-        <p:spPr>
-          <a:xfrm>
-            <a:off x="457200" y="6446520"/>
-            <a:ext cx="11247120" cy="320040"/>
-          </a:xfrm>
-          <a:prstGeom prst="rect">
-            <a:avLst/>
-          </a:prstGeom>
-          <a:noFill/>
-        </p:spPr>
-        <p:txBody>
-          <a:bodyPr wrap="square" anchor="t">
-            <a:spAutoFit/>
-          </a:bodyPr>
-          <a:lstStyle/>
-          <a:p>
-            <a:pPr algn="l"/>
-            <a:r>
-              <a:rPr sz="1000">
-                <a:solidFill>
-                  <a:srgbClr val="6B7480"/>
-                </a:solidFill>
-                <a:latin typeface="Segoe UI"/>
-              </a:rPr>
-              <a:t>Integrante 3</a:t>
-            </a:r>
-          </a:p>
-        </p:txBody>
-      </p:sp>
-      <p:sp>
-        <p:nvSpPr>
           <p:cNvPr id="5" name="TextBox 4"/>
           <p:cNvSpPr txBox="1"/>
           <p:nvPr/>
         </p:nvSpPr>
         <p:spPr>
           <a:xfrm>
-            <a:off x="457200" y="6446520"/>
-            <a:ext cx="11247120" cy="320040"/>
+            <a:off x="1423554" y="6446520"/>
+            <a:ext cx="10280765" cy="246221"/>
           </a:xfrm>
           <a:prstGeom prst="rect">
             <a:avLst/>
@@ -7409,7 +8677,7 @@
   <p:clrMapOvr>
     <a:masterClrMapping/>
   </p:clrMapOvr>
-  <p:transition advTm="20000"/>
+  <p:transition/>
 </p:sld>
 </file>
 
@@ -7515,49 +8783,14 @@
       </p:sp>
       <p:sp>
         <p:nvSpPr>
-          <p:cNvPr id="4" name="TextBox 3"/>
-          <p:cNvSpPr txBox="1"/>
-          <p:nvPr/>
-        </p:nvSpPr>
-        <p:spPr>
-          <a:xfrm>
-            <a:off x="457200" y="6446520"/>
-            <a:ext cx="11247120" cy="320040"/>
-          </a:xfrm>
-          <a:prstGeom prst="rect">
-            <a:avLst/>
-          </a:prstGeom>
-          <a:noFill/>
-        </p:spPr>
-        <p:txBody>
-          <a:bodyPr wrap="square" anchor="t">
-            <a:spAutoFit/>
-          </a:bodyPr>
-          <a:lstStyle/>
-          <a:p>
-            <a:pPr algn="l"/>
-            <a:r>
-              <a:rPr sz="1000">
-                <a:solidFill>
-                  <a:srgbClr val="6B7480"/>
-                </a:solidFill>
-                <a:latin typeface="Segoe UI"/>
-              </a:rPr>
-              <a:t>Integrante 4</a:t>
-            </a:r>
-          </a:p>
-        </p:txBody>
-      </p:sp>
-      <p:sp>
-        <p:nvSpPr>
           <p:cNvPr id="5" name="TextBox 4"/>
           <p:cNvSpPr txBox="1"/>
           <p:nvPr/>
         </p:nvSpPr>
         <p:spPr>
           <a:xfrm>
-            <a:off x="457200" y="6446520"/>
-            <a:ext cx="11247120" cy="320040"/>
+            <a:off x="1496290" y="6446520"/>
+            <a:ext cx="10208029" cy="246221"/>
           </a:xfrm>
           <a:prstGeom prst="rect">
             <a:avLst/>
@@ -7704,7 +8937,7 @@
   <p:clrMapOvr>
     <a:masterClrMapping/>
   </p:clrMapOvr>
-  <p:transition advTm="20000"/>
+  <p:transition/>
 </p:sld>
 </file>
 
@@ -7810,49 +9043,14 @@
       </p:sp>
       <p:sp>
         <p:nvSpPr>
-          <p:cNvPr id="4" name="TextBox 3"/>
-          <p:cNvSpPr txBox="1"/>
-          <p:nvPr/>
-        </p:nvSpPr>
-        <p:spPr>
-          <a:xfrm>
-            <a:off x="457200" y="6446520"/>
-            <a:ext cx="11247120" cy="320040"/>
-          </a:xfrm>
-          <a:prstGeom prst="rect">
-            <a:avLst/>
-          </a:prstGeom>
-          <a:noFill/>
-        </p:spPr>
-        <p:txBody>
-          <a:bodyPr wrap="square" anchor="t">
-            <a:spAutoFit/>
-          </a:bodyPr>
-          <a:lstStyle/>
-          <a:p>
-            <a:pPr algn="l"/>
-            <a:r>
-              <a:rPr sz="1000">
-                <a:solidFill>
-                  <a:srgbClr val="6B7480"/>
-                </a:solidFill>
-                <a:latin typeface="Segoe UI"/>
-              </a:rPr>
-              <a:t>Integrante 4</a:t>
-            </a:r>
-          </a:p>
-        </p:txBody>
-      </p:sp>
-      <p:sp>
-        <p:nvSpPr>
           <p:cNvPr id="5" name="TextBox 4"/>
           <p:cNvSpPr txBox="1"/>
           <p:nvPr/>
         </p:nvSpPr>
         <p:spPr>
           <a:xfrm>
-            <a:off x="457200" y="6446520"/>
-            <a:ext cx="11247120" cy="320040"/>
+            <a:off x="1465118" y="6446520"/>
+            <a:ext cx="10239202" cy="246221"/>
           </a:xfrm>
           <a:prstGeom prst="rect">
             <a:avLst/>
@@ -8165,7 +9363,7 @@
   <p:clrMapOvr>
     <a:masterClrMapping/>
   </p:clrMapOvr>
-  <p:transition advTm="20000"/>
+  <p:transition/>
 </p:sld>
 </file>
 
@@ -8271,49 +9469,14 @@
       </p:sp>
       <p:sp>
         <p:nvSpPr>
-          <p:cNvPr id="4" name="TextBox 3"/>
-          <p:cNvSpPr txBox="1"/>
-          <p:nvPr/>
-        </p:nvSpPr>
-        <p:spPr>
-          <a:xfrm>
-            <a:off x="457200" y="6446520"/>
-            <a:ext cx="11247120" cy="320040"/>
-          </a:xfrm>
-          <a:prstGeom prst="rect">
-            <a:avLst/>
-          </a:prstGeom>
-          <a:noFill/>
-        </p:spPr>
-        <p:txBody>
-          <a:bodyPr wrap="square" anchor="t">
-            <a:spAutoFit/>
-          </a:bodyPr>
-          <a:lstStyle/>
-          <a:p>
-            <a:pPr algn="l"/>
-            <a:r>
-              <a:rPr sz="1000">
-                <a:solidFill>
-                  <a:srgbClr val="6B7480"/>
-                </a:solidFill>
-                <a:latin typeface="Segoe UI"/>
-              </a:rPr>
-              <a:t>Integrante 4</a:t>
-            </a:r>
-          </a:p>
-        </p:txBody>
-      </p:sp>
-      <p:sp>
-        <p:nvSpPr>
           <p:cNvPr id="5" name="TextBox 4"/>
           <p:cNvSpPr txBox="1"/>
           <p:nvPr/>
         </p:nvSpPr>
         <p:spPr>
           <a:xfrm>
-            <a:off x="457200" y="6446520"/>
-            <a:ext cx="11247120" cy="320040"/>
+            <a:off x="1132608" y="6446520"/>
+            <a:ext cx="10571711" cy="246221"/>
           </a:xfrm>
           <a:prstGeom prst="rect">
             <a:avLst/>
@@ -8460,7 +9623,7 @@
   <p:clrMapOvr>
     <a:masterClrMapping/>
   </p:clrMapOvr>
-  <p:transition advTm="20000"/>
+  <p:transition/>
 </p:sld>
 </file>
 
@@ -8566,49 +9729,14 @@
       </p:sp>
       <p:sp>
         <p:nvSpPr>
-          <p:cNvPr id="4" name="TextBox 3"/>
-          <p:cNvSpPr txBox="1"/>
-          <p:nvPr/>
-        </p:nvSpPr>
-        <p:spPr>
-          <a:xfrm>
-            <a:off x="457200" y="6446520"/>
-            <a:ext cx="11247120" cy="320040"/>
-          </a:xfrm>
-          <a:prstGeom prst="rect">
-            <a:avLst/>
-          </a:prstGeom>
-          <a:noFill/>
-        </p:spPr>
-        <p:txBody>
-          <a:bodyPr wrap="square" anchor="t">
-            <a:spAutoFit/>
-          </a:bodyPr>
-          <a:lstStyle/>
-          <a:p>
-            <a:pPr algn="l"/>
-            <a:r>
-              <a:rPr sz="1000">
-                <a:solidFill>
-                  <a:srgbClr val="6B7480"/>
-                </a:solidFill>
-                <a:latin typeface="Segoe UI"/>
-              </a:rPr>
-              <a:t>Integrante 4</a:t>
-            </a:r>
-          </a:p>
-        </p:txBody>
-      </p:sp>
-      <p:sp>
-        <p:nvSpPr>
           <p:cNvPr id="5" name="TextBox 4"/>
           <p:cNvSpPr txBox="1"/>
           <p:nvPr/>
         </p:nvSpPr>
         <p:spPr>
           <a:xfrm>
-            <a:off x="457200" y="6446520"/>
-            <a:ext cx="11247120" cy="320040"/>
+            <a:off x="1645920" y="6446520"/>
+            <a:ext cx="10058400" cy="246221"/>
           </a:xfrm>
           <a:prstGeom prst="rect">
             <a:avLst/>
@@ -8841,7 +9969,7 @@
   <p:clrMapOvr>
     <a:masterClrMapping/>
   </p:clrMapOvr>
-  <p:transition advTm="20000"/>
+  <p:transition/>
 </p:sld>
 </file>
 
@@ -8864,6 +9992,50 @@
       </p:grpSpPr>
       <p:sp>
         <p:nvSpPr>
+          <p:cNvPr id="5" name="TextBox 4"/>
+          <p:cNvSpPr txBox="1"/>
+          <p:nvPr/>
+        </p:nvSpPr>
+        <p:spPr>
+          <a:xfrm>
+            <a:off x="457200" y="6446520"/>
+            <a:ext cx="11247120" cy="320040"/>
+          </a:xfrm>
+          <a:prstGeom prst="rect">
+            <a:avLst/>
+          </a:prstGeom>
+          <a:noFill/>
+        </p:spPr>
+        <p:txBody>
+          <a:bodyPr wrap="square" anchor="t">
+            <a:spAutoFit/>
+          </a:bodyPr>
+          <a:lstStyle/>
+          <a:p>
+            <a:pPr algn="r"/>
+            <a:r>
+              <a:rPr sz="1000" dirty="0" err="1">
+                <a:solidFill>
+                  <a:srgbClr val="6B7480"/>
+                </a:solidFill>
+                <a:latin typeface="Segoe UI"/>
+              </a:rPr>
+              <a:t>Diapositiva</a:t>
+            </a:r>
+            <a:r>
+              <a:rPr sz="1000" dirty="0">
+                <a:solidFill>
+                  <a:srgbClr val="6B7480"/>
+                </a:solidFill>
+                <a:latin typeface="Segoe UI"/>
+              </a:rPr>
+              <a:t> 2 / 20</a:t>
+            </a:r>
+          </a:p>
+        </p:txBody>
+      </p:sp>
+      <p:sp>
+        <p:nvSpPr>
           <p:cNvPr id="2" name="Rectangle 1"/>
           <p:cNvSpPr/>
           <p:nvPr/>
@@ -8941,76 +10113,6 @@
                 <a:latin typeface="Segoe UI"/>
               </a:rPr>
               <a:t>El dato y el target</a:t>
-            </a:r>
-          </a:p>
-        </p:txBody>
-      </p:sp>
-      <p:sp>
-        <p:nvSpPr>
-          <p:cNvPr id="4" name="TextBox 3"/>
-          <p:cNvSpPr txBox="1"/>
-          <p:nvPr/>
-        </p:nvSpPr>
-        <p:spPr>
-          <a:xfrm>
-            <a:off x="457200" y="6446520"/>
-            <a:ext cx="11247120" cy="320040"/>
-          </a:xfrm>
-          <a:prstGeom prst="rect">
-            <a:avLst/>
-          </a:prstGeom>
-          <a:noFill/>
-        </p:spPr>
-        <p:txBody>
-          <a:bodyPr wrap="square" anchor="t">
-            <a:spAutoFit/>
-          </a:bodyPr>
-          <a:lstStyle/>
-          <a:p>
-            <a:pPr algn="l"/>
-            <a:r>
-              <a:rPr sz="1000">
-                <a:solidFill>
-                  <a:srgbClr val="6B7480"/>
-                </a:solidFill>
-                <a:latin typeface="Segoe UI"/>
-              </a:rPr>
-              <a:t>Integrante 1</a:t>
-            </a:r>
-          </a:p>
-        </p:txBody>
-      </p:sp>
-      <p:sp>
-        <p:nvSpPr>
-          <p:cNvPr id="5" name="TextBox 4"/>
-          <p:cNvSpPr txBox="1"/>
-          <p:nvPr/>
-        </p:nvSpPr>
-        <p:spPr>
-          <a:xfrm>
-            <a:off x="457200" y="6446520"/>
-            <a:ext cx="11247120" cy="320040"/>
-          </a:xfrm>
-          <a:prstGeom prst="rect">
-            <a:avLst/>
-          </a:prstGeom>
-          <a:noFill/>
-        </p:spPr>
-        <p:txBody>
-          <a:bodyPr wrap="square" anchor="t">
-            <a:spAutoFit/>
-          </a:bodyPr>
-          <a:lstStyle/>
-          <a:p>
-            <a:pPr algn="r"/>
-            <a:r>
-              <a:rPr sz="1000">
-                <a:solidFill>
-                  <a:srgbClr val="6B7480"/>
-                </a:solidFill>
-                <a:latin typeface="Segoe UI"/>
-              </a:rPr>
-              <a:t>Diapositiva 2 / 20</a:t>
             </a:r>
           </a:p>
         </p:txBody>
@@ -9413,7 +10515,7 @@
   <p:clrMapOvr>
     <a:masterClrMapping/>
   </p:clrMapOvr>
-  <p:transition advTm="20000"/>
+  <p:transition/>
 </p:sld>
 </file>
 
@@ -9859,7 +10961,7 @@
   <p:clrMapOvr>
     <a:masterClrMapping/>
   </p:clrMapOvr>
-  <p:transition advTm="20000"/>
+  <p:transition/>
 </p:sld>
 </file>
 
@@ -9965,14 +11067,14 @@
       </p:sp>
       <p:sp>
         <p:nvSpPr>
-          <p:cNvPr id="4" name="TextBox 3"/>
+          <p:cNvPr id="5" name="TextBox 4"/>
           <p:cNvSpPr txBox="1"/>
           <p:nvPr/>
         </p:nvSpPr>
         <p:spPr>
           <a:xfrm>
-            <a:off x="457200" y="6446520"/>
-            <a:ext cx="11247120" cy="320040"/>
+            <a:off x="806042" y="6446520"/>
+            <a:ext cx="10898277" cy="246221"/>
           </a:xfrm>
           <a:prstGeom prst="rect">
             <a:avLst/>
@@ -9985,50 +11087,24 @@
           </a:bodyPr>
           <a:lstStyle/>
           <a:p>
-            <a:pPr algn="l"/>
-            <a:r>
-              <a:rPr sz="1000">
+            <a:pPr algn="r"/>
+            <a:r>
+              <a:rPr sz="1000" dirty="0" err="1">
                 <a:solidFill>
                   <a:srgbClr val="6B7480"/>
                 </a:solidFill>
                 <a:latin typeface="Segoe UI"/>
               </a:rPr>
-              <a:t>Integrante 1</a:t>
-            </a:r>
-          </a:p>
-        </p:txBody>
-      </p:sp>
-      <p:sp>
-        <p:nvSpPr>
-          <p:cNvPr id="5" name="TextBox 4"/>
-          <p:cNvSpPr txBox="1"/>
-          <p:nvPr/>
-        </p:nvSpPr>
-        <p:spPr>
-          <a:xfrm>
-            <a:off x="457200" y="6446520"/>
-            <a:ext cx="11247120" cy="320040"/>
-          </a:xfrm>
-          <a:prstGeom prst="rect">
-            <a:avLst/>
-          </a:prstGeom>
-          <a:noFill/>
-        </p:spPr>
-        <p:txBody>
-          <a:bodyPr wrap="square" anchor="t">
-            <a:spAutoFit/>
-          </a:bodyPr>
-          <a:lstStyle/>
-          <a:p>
-            <a:pPr algn="r"/>
-            <a:r>
-              <a:rPr sz="1000">
+              <a:t>Diapositiva</a:t>
+            </a:r>
+            <a:r>
+              <a:rPr sz="1000" dirty="0">
                 <a:solidFill>
                   <a:srgbClr val="6B7480"/>
                 </a:solidFill>
                 <a:latin typeface="Segoe UI"/>
               </a:rPr>
-              <a:t>Diapositiva 3 / 20</a:t>
+              <a:t> 3 / 20</a:t>
             </a:r>
           </a:p>
         </p:txBody>
@@ -10554,7 +11630,7 @@
   <p:clrMapOvr>
     <a:masterClrMapping/>
   </p:clrMapOvr>
-  <p:transition advTm="20000"/>
+  <p:transition/>
 </p:sld>
 </file>
 
@@ -10660,49 +11736,14 @@
       </p:sp>
       <p:sp>
         <p:nvSpPr>
-          <p:cNvPr id="4" name="TextBox 3"/>
-          <p:cNvSpPr txBox="1"/>
-          <p:nvPr/>
-        </p:nvSpPr>
-        <p:spPr>
-          <a:xfrm>
-            <a:off x="457200" y="6446520"/>
-            <a:ext cx="11247120" cy="320040"/>
-          </a:xfrm>
-          <a:prstGeom prst="rect">
-            <a:avLst/>
-          </a:prstGeom>
-          <a:noFill/>
-        </p:spPr>
-        <p:txBody>
-          <a:bodyPr wrap="square" anchor="t">
-            <a:spAutoFit/>
-          </a:bodyPr>
-          <a:lstStyle/>
-          <a:p>
-            <a:pPr algn="l"/>
-            <a:r>
-              <a:rPr sz="1000">
-                <a:solidFill>
-                  <a:srgbClr val="6B7480"/>
-                </a:solidFill>
-                <a:latin typeface="Segoe UI"/>
-              </a:rPr>
-              <a:t>Integrante 1</a:t>
-            </a:r>
-          </a:p>
-        </p:txBody>
-      </p:sp>
-      <p:sp>
-        <p:nvSpPr>
           <p:cNvPr id="5" name="TextBox 4"/>
           <p:cNvSpPr txBox="1"/>
           <p:nvPr/>
         </p:nvSpPr>
         <p:spPr>
           <a:xfrm>
-            <a:off x="457200" y="6446520"/>
-            <a:ext cx="11247120" cy="320040"/>
+            <a:off x="727364" y="6446520"/>
+            <a:ext cx="10976956" cy="246221"/>
           </a:xfrm>
           <a:prstGeom prst="rect">
             <a:avLst/>
@@ -10881,7 +11922,7 @@
   <p:clrMapOvr>
     <a:masterClrMapping/>
   </p:clrMapOvr>
-  <p:transition advTm="20000"/>
+  <p:transition/>
 </p:sld>
 </file>
 
@@ -10987,49 +12028,14 @@
       </p:sp>
       <p:sp>
         <p:nvSpPr>
-          <p:cNvPr id="4" name="TextBox 3"/>
-          <p:cNvSpPr txBox="1"/>
-          <p:nvPr/>
-        </p:nvSpPr>
-        <p:spPr>
-          <a:xfrm>
-            <a:off x="457200" y="6446520"/>
-            <a:ext cx="11247120" cy="320040"/>
-          </a:xfrm>
-          <a:prstGeom prst="rect">
-            <a:avLst/>
-          </a:prstGeom>
-          <a:noFill/>
-        </p:spPr>
-        <p:txBody>
-          <a:bodyPr wrap="square" anchor="t">
-            <a:spAutoFit/>
-          </a:bodyPr>
-          <a:lstStyle/>
-          <a:p>
-            <a:pPr algn="l"/>
-            <a:r>
-              <a:rPr sz="1000">
-                <a:solidFill>
-                  <a:srgbClr val="6B7480"/>
-                </a:solidFill>
-                <a:latin typeface="Segoe UI"/>
-              </a:rPr>
-              <a:t>Integrante 1</a:t>
-            </a:r>
-          </a:p>
-        </p:txBody>
-      </p:sp>
-      <p:sp>
-        <p:nvSpPr>
           <p:cNvPr id="5" name="TextBox 4"/>
           <p:cNvSpPr txBox="1"/>
           <p:nvPr/>
         </p:nvSpPr>
         <p:spPr>
           <a:xfrm>
-            <a:off x="457200" y="6446520"/>
-            <a:ext cx="11247120" cy="320040"/>
+            <a:off x="1194954" y="6446520"/>
+            <a:ext cx="10509365" cy="246221"/>
           </a:xfrm>
           <a:prstGeom prst="rect">
             <a:avLst/>
@@ -11673,7 +12679,7 @@
   <p:clrMapOvr>
     <a:masterClrMapping/>
   </p:clrMapOvr>
-  <p:transition advTm="20000"/>
+  <p:transition/>
 </p:sld>
 </file>
 
@@ -11779,49 +12785,14 @@
       </p:sp>
       <p:sp>
         <p:nvSpPr>
-          <p:cNvPr id="4" name="TextBox 3"/>
-          <p:cNvSpPr txBox="1"/>
-          <p:nvPr/>
-        </p:nvSpPr>
-        <p:spPr>
-          <a:xfrm>
-            <a:off x="457200" y="6446520"/>
-            <a:ext cx="11247120" cy="320040"/>
-          </a:xfrm>
-          <a:prstGeom prst="rect">
-            <a:avLst/>
-          </a:prstGeom>
-          <a:noFill/>
-        </p:spPr>
-        <p:txBody>
-          <a:bodyPr wrap="square" anchor="t">
-            <a:spAutoFit/>
-          </a:bodyPr>
-          <a:lstStyle/>
-          <a:p>
-            <a:pPr algn="l"/>
-            <a:r>
-              <a:rPr sz="1000">
-                <a:solidFill>
-                  <a:srgbClr val="6B7480"/>
-                </a:solidFill>
-                <a:latin typeface="Segoe UI"/>
-              </a:rPr>
-              <a:t>Integrante 2</a:t>
-            </a:r>
-          </a:p>
-        </p:txBody>
-      </p:sp>
-      <p:sp>
-        <p:nvSpPr>
           <p:cNvPr id="5" name="TextBox 4"/>
           <p:cNvSpPr txBox="1"/>
           <p:nvPr/>
         </p:nvSpPr>
         <p:spPr>
           <a:xfrm>
-            <a:off x="457200" y="6446520"/>
-            <a:ext cx="11247120" cy="320040"/>
+            <a:off x="860906" y="6446520"/>
+            <a:ext cx="10843413" cy="246221"/>
           </a:xfrm>
           <a:prstGeom prst="rect">
             <a:avLst/>
@@ -12268,7 +13239,7 @@
   <p:clrMapOvr>
     <a:masterClrMapping/>
   </p:clrMapOvr>
-  <p:transition advTm="20000"/>
+  <p:transition/>
 </p:sld>
 </file>
 
@@ -12374,49 +13345,14 @@
       </p:sp>
       <p:sp>
         <p:nvSpPr>
-          <p:cNvPr id="4" name="TextBox 3"/>
-          <p:cNvSpPr txBox="1"/>
-          <p:nvPr/>
-        </p:nvSpPr>
-        <p:spPr>
-          <a:xfrm>
-            <a:off x="457200" y="6446520"/>
-            <a:ext cx="11247120" cy="320040"/>
-          </a:xfrm>
-          <a:prstGeom prst="rect">
-            <a:avLst/>
-          </a:prstGeom>
-          <a:noFill/>
-        </p:spPr>
-        <p:txBody>
-          <a:bodyPr wrap="square" anchor="t">
-            <a:spAutoFit/>
-          </a:bodyPr>
-          <a:lstStyle/>
-          <a:p>
-            <a:pPr algn="l"/>
-            <a:r>
-              <a:rPr sz="1000">
-                <a:solidFill>
-                  <a:srgbClr val="6B7480"/>
-                </a:solidFill>
-                <a:latin typeface="Segoe UI"/>
-              </a:rPr>
-              <a:t>Integrante 2</a:t>
-            </a:r>
-          </a:p>
-        </p:txBody>
-      </p:sp>
-      <p:sp>
-        <p:nvSpPr>
           <p:cNvPr id="5" name="TextBox 4"/>
           <p:cNvSpPr txBox="1"/>
           <p:nvPr/>
         </p:nvSpPr>
         <p:spPr>
           <a:xfrm>
-            <a:off x="457200" y="6446520"/>
-            <a:ext cx="11247120" cy="320040"/>
+            <a:off x="1059872" y="6446520"/>
+            <a:ext cx="10644447" cy="246221"/>
           </a:xfrm>
           <a:prstGeom prst="rect">
             <a:avLst/>
@@ -12531,7 +13467,7 @@
   <p:clrMapOvr>
     <a:masterClrMapping/>
   </p:clrMapOvr>
-  <p:transition advTm="20000"/>
+  <p:transition/>
 </p:sld>
 </file>
 
@@ -12637,49 +13573,14 @@
       </p:sp>
       <p:sp>
         <p:nvSpPr>
-          <p:cNvPr id="4" name="TextBox 3"/>
-          <p:cNvSpPr txBox="1"/>
-          <p:nvPr/>
-        </p:nvSpPr>
-        <p:spPr>
-          <a:xfrm>
-            <a:off x="457200" y="6446520"/>
-            <a:ext cx="11247120" cy="320040"/>
-          </a:xfrm>
-          <a:prstGeom prst="rect">
-            <a:avLst/>
-          </a:prstGeom>
-          <a:noFill/>
-        </p:spPr>
-        <p:txBody>
-          <a:bodyPr wrap="square" anchor="t">
-            <a:spAutoFit/>
-          </a:bodyPr>
-          <a:lstStyle/>
-          <a:p>
-            <a:pPr algn="l"/>
-            <a:r>
-              <a:rPr sz="1000">
-                <a:solidFill>
-                  <a:srgbClr val="6B7480"/>
-                </a:solidFill>
-                <a:latin typeface="Segoe UI"/>
-              </a:rPr>
-              <a:t>Integrante 2</a:t>
-            </a:r>
-          </a:p>
-        </p:txBody>
-      </p:sp>
-      <p:sp>
-        <p:nvSpPr>
           <p:cNvPr id="5" name="TextBox 4"/>
           <p:cNvSpPr txBox="1"/>
           <p:nvPr/>
         </p:nvSpPr>
         <p:spPr>
           <a:xfrm>
-            <a:off x="457200" y="6446520"/>
-            <a:ext cx="11247120" cy="320040"/>
+            <a:off x="935182" y="6446520"/>
+            <a:ext cx="10769138" cy="246221"/>
           </a:xfrm>
           <a:prstGeom prst="rect">
             <a:avLst/>
@@ -12948,7 +13849,7 @@
   <p:clrMapOvr>
     <a:masterClrMapping/>
   </p:clrMapOvr>
-  <p:transition advTm="20000"/>
+  <p:transition/>
 </p:sld>
 </file>
 
@@ -13054,49 +13955,14 @@
       </p:sp>
       <p:sp>
         <p:nvSpPr>
-          <p:cNvPr id="4" name="TextBox 3"/>
-          <p:cNvSpPr txBox="1"/>
-          <p:nvPr/>
-        </p:nvSpPr>
-        <p:spPr>
-          <a:xfrm>
-            <a:off x="457200" y="6446520"/>
-            <a:ext cx="11247120" cy="320040"/>
-          </a:xfrm>
-          <a:prstGeom prst="rect">
-            <a:avLst/>
-          </a:prstGeom>
-          <a:noFill/>
-        </p:spPr>
-        <p:txBody>
-          <a:bodyPr wrap="square" anchor="t">
-            <a:spAutoFit/>
-          </a:bodyPr>
-          <a:lstStyle/>
-          <a:p>
-            <a:pPr algn="l"/>
-            <a:r>
-              <a:rPr sz="1000">
-                <a:solidFill>
-                  <a:srgbClr val="6B7480"/>
-                </a:solidFill>
-                <a:latin typeface="Segoe UI"/>
-              </a:rPr>
-              <a:t>Integrante 2</a:t>
-            </a:r>
-          </a:p>
-        </p:txBody>
-      </p:sp>
-      <p:sp>
-        <p:nvSpPr>
           <p:cNvPr id="5" name="TextBox 4"/>
           <p:cNvSpPr txBox="1"/>
           <p:nvPr/>
         </p:nvSpPr>
         <p:spPr>
           <a:xfrm>
-            <a:off x="457200" y="6446520"/>
-            <a:ext cx="11247120" cy="320040"/>
+            <a:off x="893618" y="6446520"/>
+            <a:ext cx="10810702" cy="246221"/>
           </a:xfrm>
           <a:prstGeom prst="rect">
             <a:avLst/>
@@ -13570,7 +14436,7 @@
   <p:clrMapOvr>
     <a:masterClrMapping/>
   </p:clrMapOvr>
-  <p:transition advTm="20000"/>
+  <p:transition/>
 </p:sld>
 </file>
 
